--- a/brief/HSOAG_Quality_LOE.pptx
+++ b/brief/HSOAG_Quality_LOE.pptx
@@ -863,7 +863,7 @@
           <a:p>
             <a:r>
               <a:rPr lang="en-US" dirty="0"/>
-              <a:t>Awaiting EWP source material. Slide structure mirrors the CSC and simulation slides so the three lines of effort read as parallel.</a:t>
+              <a:t>The two hard stops are where transfers actually go wrong. Expiring-within-90-days is the most common way a case gets processed down the wrong track. Supervised privileges at an operational platform drives more I MEF adjudication than anything else in the policy — and it is the same substitution question the simulation quantifies. Note also that privilege duration is 3 years with NPDB Continuous Query enrollment and 2 years without, which is what sets the 90-day clock.</a:t>
             </a:r>
             <a:endParaRPr lang="en-US" dirty="0"/>
           </a:p>
@@ -1303,7 +1303,7 @@
           <a:p>
             <a:r>
               <a:rPr lang="en-US" dirty="0"/>
-              <a:t>This is the slide to land if you only get one. The portfolio argument is stronger than any individual effort's argument.</a:t>
+              <a:t>This is the slide to land if you only get one. Two of these four links were not visible until the lines of effort were put side by side. The 1102 point is the practical one — charter Measure Dx as an MQA activity under the same authority EWP already operates under, and the protection question is answered once. The scope-of-utilization point is the conceptual one: EWP and CSC are describing the same gap between what a provider is credentialed to do and what the location can actually support. Closing thought if asked: take any one away and the others lose a function — an untested standard, an outcome with no definition, or a prediction never checked against what happened.</a:t>
             </a:r>
             <a:endParaRPr lang="en-US" dirty="0"/>
           </a:p>
@@ -1810,7 +1810,7 @@
                 <a:ea typeface="Calibri" pitchFamily="34" charset="-122"/>
                 <a:cs typeface="Calibri" pitchFamily="34" charset="-120"/>
               </a:rPr>
-              <a:t>Four efforts, one measurement architecture — Early Warning, Crisis Standards of Care, Simulation, and Diagnostic Safety</a:t>
+              <a:t>Four efforts, one measurement architecture — Enterprise-Wide Privileging, Crisis Standards of Care, Simulation, and Diagnostic Safety</a:t>
             </a:r>
             <a:endParaRPr lang="en-US" sz="1400" dirty="0"/>
           </a:p>
@@ -2401,7 +2401,7 @@
             <a:avLst/>
           </a:prstGeom>
           <a:solidFill>
-            <a:srgbClr val="1C5D66"/>
+            <a:srgbClr val="7FA99B"/>
           </a:solidFill>
           <a:ln/>
         </p:spPr>
@@ -2439,7 +2439,7 @@
                 <a:ea typeface="Cambria" pitchFamily="34" charset="-122"/>
                 <a:cs typeface="Cambria" pitchFamily="34" charset="-120"/>
               </a:rPr>
-              <a:t>CSC</a:t>
+              <a:t>EWP</a:t>
             </a:r>
             <a:endParaRPr lang="en-US" sz="1600" dirty="0"/>
           </a:p>
@@ -2478,7 +2478,7 @@
                 <a:ea typeface="Calibri" pitchFamily="34" charset="-122"/>
                 <a:cs typeface="Calibri" pitchFamily="34" charset="-120"/>
               </a:rPr>
-              <a:t>Confirm whether “accepted / in press” satisfies the citation requirement, and identify the I&amp;L action officer to staff the white paper.</a:t>
+              <a:t>Advocate the successor instruction to BUMEDNOTE 6000 before its Nov 2026 cancellation, and seek enterprise clarification on supervised privileges at operational platforms.</a:t>
             </a:r>
             <a:endParaRPr lang="en-US" sz="1250" dirty="0"/>
           </a:p>
@@ -2526,7 +2526,7 @@
             <a:avLst/>
           </a:prstGeom>
           <a:solidFill>
-            <a:srgbClr val="C25E3A"/>
+            <a:srgbClr val="1C5D66"/>
           </a:solidFill>
           <a:ln/>
         </p:spPr>
@@ -2564,7 +2564,7 @@
                 <a:ea typeface="Cambria" pitchFamily="34" charset="-122"/>
                 <a:cs typeface="Cambria" pitchFamily="34" charset="-120"/>
               </a:rPr>
-              <a:t>Simulation</a:t>
+              <a:t>CSC</a:t>
             </a:r>
             <a:endParaRPr lang="en-US" sz="1600" dirty="0"/>
           </a:p>
@@ -2603,7 +2603,7 @@
                 <a:ea typeface="Calibri" pitchFamily="34" charset="-122"/>
                 <a:cs typeface="Calibri" pitchFamily="34" charset="-120"/>
               </a:rPr>
-              <a:t>Sponsor an SME face-validity review panel. The model cannot be cited in a decision until it has one.</a:t>
+              <a:t>Confirm whether “accepted / in press” satisfies the citation requirement, and identify the I&amp;L action officer to staff the white paper.</a:t>
             </a:r>
             <a:endParaRPr lang="en-US" sz="1250" dirty="0"/>
           </a:p>
@@ -2651,7 +2651,7 @@
             <a:avLst/>
           </a:prstGeom>
           <a:solidFill>
-            <a:srgbClr val="12212B"/>
+            <a:srgbClr val="C25E3A"/>
           </a:solidFill>
           <a:ln/>
         </p:spPr>
@@ -2689,7 +2689,7 @@
                 <a:ea typeface="Cambria" pitchFamily="34" charset="-122"/>
                 <a:cs typeface="Cambria" pitchFamily="34" charset="-120"/>
               </a:rPr>
-              <a:t>Measure Dx</a:t>
+              <a:t>Simulation</a:t>
             </a:r>
             <a:endParaRPr lang="en-US" sz="1600" dirty="0"/>
           </a:p>
@@ -2728,7 +2728,7 @@
                 <a:ea typeface="Calibri" pitchFamily="34" charset="-122"/>
                 <a:cs typeface="Calibri" pitchFamily="34" charset="-120"/>
               </a:rPr>
-              <a:t>Authorize a 12-month pilot at one division, and name the analytic partner for the data extract.</a:t>
+              <a:t>Sponsor an SME face-validity review panel. The model cannot be cited in a decision until it has one.</a:t>
             </a:r>
             <a:endParaRPr lang="en-US" sz="1250" dirty="0"/>
           </a:p>
@@ -2776,7 +2776,7 @@
             <a:avLst/>
           </a:prstGeom>
           <a:solidFill>
-            <a:srgbClr val="7FA99B"/>
+            <a:srgbClr val="12212B"/>
           </a:solidFill>
           <a:ln/>
         </p:spPr>
@@ -2814,7 +2814,7 @@
                 <a:ea typeface="Cambria" pitchFamily="34" charset="-122"/>
                 <a:cs typeface="Cambria" pitchFamily="34" charset="-120"/>
               </a:rPr>
-              <a:t>EWP</a:t>
+              <a:t>Measure Dx</a:t>
             </a:r>
             <a:endParaRPr lang="en-US" sz="1600" dirty="0"/>
           </a:p>
@@ -2853,7 +2853,7 @@
                 <a:ea typeface="Calibri" pitchFamily="34" charset="-122"/>
                 <a:cs typeface="Calibri" pitchFamily="34" charset="-120"/>
               </a:rPr>
-              <a:t>[Ask pending EWP material.]</a:t>
+              <a:t>Authorize a 12-month pilot at one division, and name the analytic partner for the data extract.</a:t>
             </a:r>
             <a:endParaRPr lang="en-US" sz="1250" dirty="0"/>
           </a:p>
@@ -4144,23 +4144,23 @@
         <p:spPr>
           <a:xfrm>
             <a:off x="822960" y="3456432"/>
-            <a:ext cx="1975104" cy="548640"/>
-          </a:xfrm>
-          <a:prstGeom prst="rect">
-            <a:avLst/>
-          </a:prstGeom>
-          <a:noFill/>
-          <a:ln/>
-        </p:spPr>
-        <p:txBody>
-          <a:bodyPr wrap="square" lIns="0" tIns="0" rIns="0" bIns="0" rtlCol="0" anchor="ctr"/>
-          <a:lstStyle/>
-          <a:p>
-            <a:pPr indent="0" marL="0">
-              <a:buNone/>
-            </a:pPr>
-            <a:r>
-              <a:rPr lang="en-US" sz="1300" b="1" i="1" dirty="0">
+            <a:ext cx="1975104" cy="731520"/>
+          </a:xfrm>
+          <a:prstGeom prst="rect">
+            <a:avLst/>
+          </a:prstGeom>
+          <a:noFill/>
+          <a:ln/>
+        </p:spPr>
+        <p:txBody>
+          <a:bodyPr wrap="square" lIns="0" tIns="0" rIns="0" bIns="0" rtlCol="0" anchor="ctr"/>
+          <a:lstStyle/>
+          <a:p>
+            <a:pPr indent="0" marL="0">
+              <a:buNone/>
+            </a:pPr>
+            <a:r>
+              <a:rPr lang="en-US" sz="1250" b="1" i="1" dirty="0">
                 <a:solidFill>
                   <a:srgbClr val="7FA99B"/>
                 </a:solidFill>
@@ -4168,9 +4168,9 @@
                 <a:ea typeface="Calibri" pitchFamily="34" charset="-122"/>
                 <a:cs typeface="Calibri" pitchFamily="34" charset="-120"/>
               </a:rPr>
-              <a:t>What is coming?</a:t>
-            </a:r>
-            <a:endParaRPr lang="en-US" sz="1300" dirty="0"/>
+              <a:t>Who may practice here, and at what scope?</a:t>
+            </a:r>
+            <a:endParaRPr lang="en-US" sz="1250" dirty="0"/>
           </a:p>
         </p:txBody>
       </p:sp>
@@ -4182,8 +4182,8 @@
         </p:nvSpPr>
         <p:spPr>
           <a:xfrm>
-            <a:off x="822960" y="4160520"/>
-            <a:ext cx="1975104" cy="457200"/>
+            <a:off x="822960" y="4279392"/>
+            <a:ext cx="1975104" cy="411480"/>
           </a:xfrm>
           <a:prstGeom prst="rect">
             <a:avLst/>
@@ -4207,7 +4207,7 @@
                 <a:ea typeface="Calibri" pitchFamily="34" charset="-122"/>
                 <a:cs typeface="Calibri" pitchFamily="34" charset="-120"/>
               </a:rPr>
-              <a:t>Anticipate</a:t>
+              <a:t>Authorize the provider</a:t>
             </a:r>
             <a:endParaRPr lang="en-US" sz="1200" dirty="0"/>
           </a:p>
@@ -4383,23 +4383,23 @@
         <p:spPr>
           <a:xfrm>
             <a:off x="3694176" y="3456432"/>
-            <a:ext cx="1975104" cy="548640"/>
-          </a:xfrm>
-          <a:prstGeom prst="rect">
-            <a:avLst/>
-          </a:prstGeom>
-          <a:noFill/>
-          <a:ln/>
-        </p:spPr>
-        <p:txBody>
-          <a:bodyPr wrap="square" lIns="0" tIns="0" rIns="0" bIns="0" rtlCol="0" anchor="ctr"/>
-          <a:lstStyle/>
-          <a:p>
-            <a:pPr indent="0" marL="0">
-              <a:buNone/>
-            </a:pPr>
-            <a:r>
-              <a:rPr lang="en-US" sz="1300" b="1" i="1" dirty="0">
+            <a:ext cx="1975104" cy="731520"/>
+          </a:xfrm>
+          <a:prstGeom prst="rect">
+            <a:avLst/>
+          </a:prstGeom>
+          <a:noFill/>
+          <a:ln/>
+        </p:spPr>
+        <p:txBody>
+          <a:bodyPr wrap="square" lIns="0" tIns="0" rIns="0" bIns="0" rtlCol="0" anchor="ctr"/>
+          <a:lstStyle/>
+          <a:p>
+            <a:pPr indent="0" marL="0">
+              <a:buNone/>
+            </a:pPr>
+            <a:r>
+              <a:rPr lang="en-US" sz="1250" b="1" i="1" dirty="0">
                 <a:solidFill>
                   <a:srgbClr val="1C5D66"/>
                 </a:solidFill>
@@ -4407,9 +4407,9 @@
                 <a:ea typeface="Calibri" pitchFamily="34" charset="-122"/>
                 <a:cs typeface="Calibri" pitchFamily="34" charset="-120"/>
               </a:rPr>
-              <a:t>What is good, right now?</a:t>
-            </a:r>
-            <a:endParaRPr lang="en-US" sz="1300" dirty="0"/>
+              <a:t>What is good care, right now?</a:t>
+            </a:r>
+            <a:endParaRPr lang="en-US" sz="1250" dirty="0"/>
           </a:p>
         </p:txBody>
       </p:sp>
@@ -4421,8 +4421,8 @@
         </p:nvSpPr>
         <p:spPr>
           <a:xfrm>
-            <a:off x="3694176" y="4160520"/>
-            <a:ext cx="1975104" cy="457200"/>
+            <a:off x="3694176" y="4279392"/>
+            <a:ext cx="1975104" cy="411480"/>
           </a:xfrm>
           <a:prstGeom prst="rect">
             <a:avLst/>
@@ -4622,23 +4622,23 @@
         <p:spPr>
           <a:xfrm>
             <a:off x="6565392" y="3456432"/>
-            <a:ext cx="1975104" cy="548640"/>
-          </a:xfrm>
-          <a:prstGeom prst="rect">
-            <a:avLst/>
-          </a:prstGeom>
-          <a:noFill/>
-          <a:ln/>
-        </p:spPr>
-        <p:txBody>
-          <a:bodyPr wrap="square" lIns="0" tIns="0" rIns="0" bIns="0" rtlCol="0" anchor="ctr"/>
-          <a:lstStyle/>
-          <a:p>
-            <a:pPr indent="0" marL="0">
-              <a:buNone/>
-            </a:pPr>
-            <a:r>
-              <a:rPr lang="en-US" sz="1300" b="1" i="1" dirty="0">
+            <a:ext cx="1975104" cy="731520"/>
+          </a:xfrm>
+          <a:prstGeom prst="rect">
+            <a:avLst/>
+          </a:prstGeom>
+          <a:noFill/>
+          <a:ln/>
+        </p:spPr>
+        <p:txBody>
+          <a:bodyPr wrap="square" lIns="0" tIns="0" rIns="0" bIns="0" rtlCol="0" anchor="ctr"/>
+          <a:lstStyle/>
+          <a:p>
+            <a:pPr indent="0" marL="0">
+              <a:buNone/>
+            </a:pPr>
+            <a:r>
+              <a:rPr lang="en-US" sz="1250" b="1" i="1" dirty="0">
                 <a:solidFill>
                   <a:srgbClr val="C25E3A"/>
                 </a:solidFill>
@@ -4646,9 +4646,9 @@
                 <a:ea typeface="Calibri" pitchFamily="34" charset="-122"/>
                 <a:cs typeface="Calibri" pitchFamily="34" charset="-120"/>
               </a:rPr>
-              <a:t>Where does it break?</a:t>
-            </a:r>
-            <a:endParaRPr lang="en-US" sz="1300" dirty="0"/>
+              <a:t>Where does the configuration break?</a:t>
+            </a:r>
+            <a:endParaRPr lang="en-US" sz="1250" dirty="0"/>
           </a:p>
         </p:txBody>
       </p:sp>
@@ -4660,8 +4660,8 @@
         </p:nvSpPr>
         <p:spPr>
           <a:xfrm>
-            <a:off x="6565392" y="4160520"/>
-            <a:ext cx="1975104" cy="457200"/>
+            <a:off x="6565392" y="4279392"/>
+            <a:ext cx="1975104" cy="411480"/>
           </a:xfrm>
           <a:prstGeom prst="rect">
             <a:avLst/>
@@ -4861,23 +4861,23 @@
         <p:spPr>
           <a:xfrm>
             <a:off x="9436608" y="3456432"/>
-            <a:ext cx="1975104" cy="548640"/>
-          </a:xfrm>
-          <a:prstGeom prst="rect">
-            <a:avLst/>
-          </a:prstGeom>
-          <a:noFill/>
-          <a:ln/>
-        </p:spPr>
-        <p:txBody>
-          <a:bodyPr wrap="square" lIns="0" tIns="0" rIns="0" bIns="0" rtlCol="0" anchor="ctr"/>
-          <a:lstStyle/>
-          <a:p>
-            <a:pPr indent="0" marL="0">
-              <a:buNone/>
-            </a:pPr>
-            <a:r>
-              <a:rPr lang="en-US" sz="1300" b="1" i="1" dirty="0">
+            <a:ext cx="1975104" cy="731520"/>
+          </a:xfrm>
+          <a:prstGeom prst="rect">
+            <a:avLst/>
+          </a:prstGeom>
+          <a:noFill/>
+          <a:ln/>
+        </p:spPr>
+        <p:txBody>
+          <a:bodyPr wrap="square" lIns="0" tIns="0" rIns="0" bIns="0" rtlCol="0" anchor="ctr"/>
+          <a:lstStyle/>
+          <a:p>
+            <a:pPr indent="0" marL="0">
+              <a:buNone/>
+            </a:pPr>
+            <a:r>
+              <a:rPr lang="en-US" sz="1250" b="1" i="1" dirty="0">
                 <a:solidFill>
                   <a:srgbClr val="12212B"/>
                 </a:solidFill>
@@ -4885,9 +4885,9 @@
                 <a:ea typeface="Calibri" pitchFamily="34" charset="-122"/>
                 <a:cs typeface="Calibri" pitchFamily="34" charset="-120"/>
               </a:rPr>
-              <a:t>What did we miss?</a:t>
-            </a:r>
-            <a:endParaRPr lang="en-US" sz="1300" dirty="0"/>
+              <a:t>What did we actually miss?</a:t>
+            </a:r>
+            <a:endParaRPr lang="en-US" sz="1250" dirty="0"/>
           </a:p>
         </p:txBody>
       </p:sp>
@@ -4899,8 +4899,8 @@
         </p:nvSpPr>
         <p:spPr>
           <a:xfrm>
-            <a:off x="9436608" y="4160520"/>
-            <a:ext cx="1975104" cy="457200"/>
+            <a:off x="9436608" y="4279392"/>
+            <a:ext cx="1975104" cy="411480"/>
           </a:xfrm>
           <a:prstGeom prst="rect">
             <a:avLst/>
@@ -5114,7 +5114,7 @@
                 <a:ea typeface="Cambria" pitchFamily="34" charset="-122"/>
                 <a:cs typeface="Cambria" pitchFamily="34" charset="-120"/>
               </a:rPr>
-              <a:t>EWP — [expansion pending]</a:t>
+              <a:t>Enterprise-Wide Privileging</a:t>
             </a:r>
             <a:endParaRPr lang="en-US" sz="3000" dirty="0"/>
           </a:p>
@@ -5202,18 +5202,491 @@
       </p:sp>
       <p:sp>
         <p:nvSpPr>
-          <p:cNvPr id="8" name="Shape 6"/>
-          <p:cNvSpPr/>
-          <p:nvPr/>
-        </p:nvSpPr>
-        <p:spPr>
-          <a:xfrm>
-            <a:off x="566928" y="1783080"/>
-            <a:ext cx="10881360" cy="960120"/>
+          <p:cNvPr id="8" name="Text 6"/>
+          <p:cNvSpPr/>
+          <p:nvPr/>
+        </p:nvSpPr>
+        <p:spPr>
+          <a:xfrm>
+            <a:off x="566928" y="1691640"/>
+            <a:ext cx="6903720" cy="1170432"/>
+          </a:xfrm>
+          <a:prstGeom prst="rect">
+            <a:avLst/>
+          </a:prstGeom>
+          <a:noFill/>
+          <a:ln/>
+        </p:spPr>
+        <p:txBody>
+          <a:bodyPr wrap="square" lIns="0" tIns="0" rIns="0" bIns="0" rtlCol="0" anchor="ctr"/>
+          <a:lstStyle/>
+          <a:p>
+            <a:pPr indent="0" marL="0">
+              <a:lnSpc>
+                <a:spcPts val="1800"/>
+              </a:lnSpc>
+              <a:buNone/>
+            </a:pPr>
+            <a:r>
+              <a:rPr lang="en-US" sz="1250" dirty="0">
+                <a:solidFill>
+                  <a:srgbClr val="5A6B72"/>
+                </a:solidFill>
+                <a:latin typeface="Calibri" pitchFamily="34" charset="0"/>
+                <a:ea typeface="Calibri" pitchFamily="34" charset="-122"/>
+                <a:cs typeface="Calibri" pitchFamily="34" charset="-120"/>
+              </a:rPr>
+              <a:t>Privileges are now MHS privileges — portable across the enterprise without a re-privileging action, held to the top of the provider's training rather than to the gaining facility's scope. The gaining command no longer adjudicates competence; it authorizes practice. For I MEF that means inheriting privileged providers on a five-business-day clock and catching the exceptions before arrival, not after.</a:t>
+            </a:r>
+            <a:endParaRPr lang="en-US" sz="1250" dirty="0"/>
+          </a:p>
+        </p:txBody>
+      </p:sp>
+      <p:sp>
+        <p:nvSpPr>
+          <p:cNvPr id="9" name="Text 7"/>
+          <p:cNvSpPr/>
+          <p:nvPr/>
+        </p:nvSpPr>
+        <p:spPr>
+          <a:xfrm>
+            <a:off x="566928" y="3017520"/>
+            <a:ext cx="6903720" cy="219456"/>
+          </a:xfrm>
+          <a:prstGeom prst="rect">
+            <a:avLst/>
+          </a:prstGeom>
+          <a:noFill/>
+          <a:ln/>
+        </p:spPr>
+        <p:txBody>
+          <a:bodyPr wrap="square" lIns="0" tIns="0" rIns="0" bIns="0" rtlCol="0" anchor="ctr"/>
+          <a:lstStyle/>
+          <a:p>
+            <a:pPr indent="0" marL="0">
+              <a:buNone/>
+            </a:pPr>
+            <a:r>
+              <a:rPr lang="en-US" sz="1000" b="1" spc="140" kern="0" dirty="0">
+                <a:solidFill>
+                  <a:srgbClr val="C25E3A"/>
+                </a:solidFill>
+                <a:latin typeface="Calibri" pitchFamily="34" charset="0"/>
+                <a:ea typeface="Calibri" pitchFamily="34" charset="-122"/>
+                <a:cs typeface="Calibri" pitchFamily="34" charset="-120"/>
+              </a:rPr>
+              <a:t>THE CLOCK</a:t>
+            </a:r>
+            <a:endParaRPr lang="en-US" sz="1000" dirty="0"/>
+          </a:p>
+        </p:txBody>
+      </p:sp>
+      <p:sp>
+        <p:nvSpPr>
+          <p:cNvPr id="10" name="Shape 8"/>
+          <p:cNvSpPr/>
+          <p:nvPr/>
+        </p:nvSpPr>
+        <p:spPr>
+          <a:xfrm>
+            <a:off x="566928" y="3383280"/>
+            <a:ext cx="118872" cy="118872"/>
+          </a:xfrm>
+          <a:prstGeom prst="ellipse">
+            <a:avLst/>
+          </a:prstGeom>
+          <a:solidFill>
+            <a:srgbClr val="7FA99B"/>
+          </a:solidFill>
+          <a:ln/>
+        </p:spPr>
+      </p:sp>
+      <p:sp>
+        <p:nvSpPr>
+          <p:cNvPr id="11" name="Text 9"/>
+          <p:cNvSpPr/>
+          <p:nvPr/>
+        </p:nvSpPr>
+        <p:spPr>
+          <a:xfrm>
+            <a:off x="841248" y="3310128"/>
+            <a:ext cx="1755648" cy="274320"/>
+          </a:xfrm>
+          <a:prstGeom prst="rect">
+            <a:avLst/>
+          </a:prstGeom>
+          <a:noFill/>
+          <a:ln/>
+        </p:spPr>
+        <p:txBody>
+          <a:bodyPr wrap="square" lIns="0" tIns="0" rIns="0" bIns="0" rtlCol="0" anchor="ctr"/>
+          <a:lstStyle/>
+          <a:p>
+            <a:pPr indent="0" marL="0">
+              <a:buNone/>
+            </a:pPr>
+            <a:r>
+              <a:rPr lang="en-US" sz="1150" b="1" dirty="0">
+                <a:solidFill>
+                  <a:srgbClr val="12212B"/>
+                </a:solidFill>
+                <a:latin typeface="Calibri" pitchFamily="34" charset="0"/>
+                <a:ea typeface="Calibri" pitchFamily="34" charset="-122"/>
+                <a:cs typeface="Calibri" pitchFamily="34" charset="-120"/>
+              </a:rPr>
+              <a:t>1 calendar day</a:t>
+            </a:r>
+            <a:endParaRPr lang="en-US" sz="1150" dirty="0"/>
+          </a:p>
+        </p:txBody>
+      </p:sp>
+      <p:sp>
+        <p:nvSpPr>
+          <p:cNvPr id="12" name="Text 10"/>
+          <p:cNvSpPr/>
+          <p:nvPr/>
+        </p:nvSpPr>
+        <p:spPr>
+          <a:xfrm>
+            <a:off x="2670048" y="3310128"/>
+            <a:ext cx="4800600" cy="274320"/>
+          </a:xfrm>
+          <a:prstGeom prst="rect">
+            <a:avLst/>
+          </a:prstGeom>
+          <a:noFill/>
+          <a:ln/>
+        </p:spPr>
+        <p:txBody>
+          <a:bodyPr wrap="square" lIns="0" tIns="0" rIns="0" bIns="0" rtlCol="0" anchor="ctr"/>
+          <a:lstStyle/>
+          <a:p>
+            <a:pPr indent="0" marL="0">
+              <a:buNone/>
+            </a:pPr>
+            <a:r>
+              <a:rPr lang="en-US" sz="1150" dirty="0">
+                <a:solidFill>
+                  <a:srgbClr val="5A6B72"/>
+                </a:solidFill>
+                <a:latin typeface="Calibri" pitchFamily="34" charset="0"/>
+                <a:ea typeface="Calibri" pitchFamily="34" charset="-122"/>
+                <a:cs typeface="Calibri" pitchFamily="34" charset="-120"/>
+              </a:rPr>
+              <a:t>Clinician notifies the PA of orders</a:t>
+            </a:r>
+            <a:endParaRPr lang="en-US" sz="1150" dirty="0"/>
+          </a:p>
+        </p:txBody>
+      </p:sp>
+      <p:sp>
+        <p:nvSpPr>
+          <p:cNvPr id="13" name="Shape 11"/>
+          <p:cNvSpPr/>
+          <p:nvPr/>
+        </p:nvSpPr>
+        <p:spPr>
+          <a:xfrm>
+            <a:off x="566928" y="3803904"/>
+            <a:ext cx="118872" cy="118872"/>
+          </a:xfrm>
+          <a:prstGeom prst="ellipse">
+            <a:avLst/>
+          </a:prstGeom>
+          <a:solidFill>
+            <a:srgbClr val="7FA99B"/>
+          </a:solidFill>
+          <a:ln/>
+        </p:spPr>
+      </p:sp>
+      <p:sp>
+        <p:nvSpPr>
+          <p:cNvPr id="14" name="Text 12"/>
+          <p:cNvSpPr/>
+          <p:nvPr/>
+        </p:nvSpPr>
+        <p:spPr>
+          <a:xfrm>
+            <a:off x="841248" y="3730752"/>
+            <a:ext cx="1755648" cy="274320"/>
+          </a:xfrm>
+          <a:prstGeom prst="rect">
+            <a:avLst/>
+          </a:prstGeom>
+          <a:noFill/>
+          <a:ln/>
+        </p:spPr>
+        <p:txBody>
+          <a:bodyPr wrap="square" lIns="0" tIns="0" rIns="0" bIns="0" rtlCol="0" anchor="ctr"/>
+          <a:lstStyle/>
+          <a:p>
+            <a:pPr indent="0" marL="0">
+              <a:buNone/>
+            </a:pPr>
+            <a:r>
+              <a:rPr lang="en-US" sz="1150" b="1" dirty="0">
+                <a:solidFill>
+                  <a:srgbClr val="12212B"/>
+                </a:solidFill>
+                <a:latin typeface="Calibri" pitchFamily="34" charset="0"/>
+                <a:ea typeface="Calibri" pitchFamily="34" charset="-122"/>
+                <a:cs typeface="Calibri" pitchFamily="34" charset="-120"/>
+              </a:rPr>
+              <a:t>24 hours</a:t>
+            </a:r>
+            <a:endParaRPr lang="en-US" sz="1150" dirty="0"/>
+          </a:p>
+        </p:txBody>
+      </p:sp>
+      <p:sp>
+        <p:nvSpPr>
+          <p:cNvPr id="15" name="Text 13"/>
+          <p:cNvSpPr/>
+          <p:nvPr/>
+        </p:nvSpPr>
+        <p:spPr>
+          <a:xfrm>
+            <a:off x="2670048" y="3730752"/>
+            <a:ext cx="4800600" cy="274320"/>
+          </a:xfrm>
+          <a:prstGeom prst="rect">
+            <a:avLst/>
+          </a:prstGeom>
+          <a:noFill/>
+          <a:ln/>
+        </p:spPr>
+        <p:txBody>
+          <a:bodyPr wrap="square" lIns="0" tIns="0" rIns="0" bIns="0" rtlCol="0" anchor="ctr"/>
+          <a:lstStyle/>
+          <a:p>
+            <a:pPr indent="0" marL="0">
+              <a:buNone/>
+            </a:pPr>
+            <a:r>
+              <a:rPr lang="en-US" sz="1150" dirty="0">
+                <a:solidFill>
+                  <a:srgbClr val="5A6B72"/>
+                </a:solidFill>
+                <a:latin typeface="Calibri" pitchFamily="34" charset="0"/>
+                <a:ea typeface="Calibri" pitchFamily="34" charset="-122"/>
+                <a:cs typeface="Calibri" pitchFamily="34" charset="-120"/>
+              </a:rPr>
+              <a:t>MSP office reviews the credentials record</a:t>
+            </a:r>
+            <a:endParaRPr lang="en-US" sz="1150" dirty="0"/>
+          </a:p>
+        </p:txBody>
+      </p:sp>
+      <p:sp>
+        <p:nvSpPr>
+          <p:cNvPr id="16" name="Shape 14"/>
+          <p:cNvSpPr/>
+          <p:nvPr/>
+        </p:nvSpPr>
+        <p:spPr>
+          <a:xfrm>
+            <a:off x="566928" y="4224528"/>
+            <a:ext cx="118872" cy="118872"/>
+          </a:xfrm>
+          <a:prstGeom prst="ellipse">
+            <a:avLst/>
+          </a:prstGeom>
+          <a:solidFill>
+            <a:srgbClr val="7FA99B"/>
+          </a:solidFill>
+          <a:ln/>
+        </p:spPr>
+      </p:sp>
+      <p:sp>
+        <p:nvSpPr>
+          <p:cNvPr id="17" name="Text 15"/>
+          <p:cNvSpPr/>
+          <p:nvPr/>
+        </p:nvSpPr>
+        <p:spPr>
+          <a:xfrm>
+            <a:off x="841248" y="4151376"/>
+            <a:ext cx="1755648" cy="274320"/>
+          </a:xfrm>
+          <a:prstGeom prst="rect">
+            <a:avLst/>
+          </a:prstGeom>
+          <a:noFill/>
+          <a:ln/>
+        </p:spPr>
+        <p:txBody>
+          <a:bodyPr wrap="square" lIns="0" tIns="0" rIns="0" bIns="0" rtlCol="0" anchor="ctr"/>
+          <a:lstStyle/>
+          <a:p>
+            <a:pPr indent="0" marL="0">
+              <a:buNone/>
+            </a:pPr>
+            <a:r>
+              <a:rPr lang="en-US" sz="1150" b="1" dirty="0">
+                <a:solidFill>
+                  <a:srgbClr val="12212B"/>
+                </a:solidFill>
+                <a:latin typeface="Calibri" pitchFamily="34" charset="0"/>
+                <a:ea typeface="Calibri" pitchFamily="34" charset="-122"/>
+                <a:cs typeface="Calibri" pitchFamily="34" charset="-120"/>
+              </a:rPr>
+              <a:t>5 business days</a:t>
+            </a:r>
+            <a:endParaRPr lang="en-US" sz="1150" dirty="0"/>
+          </a:p>
+        </p:txBody>
+      </p:sp>
+      <p:sp>
+        <p:nvSpPr>
+          <p:cNvPr id="18" name="Text 16"/>
+          <p:cNvSpPr/>
+          <p:nvPr/>
+        </p:nvSpPr>
+        <p:spPr>
+          <a:xfrm>
+            <a:off x="2670048" y="4151376"/>
+            <a:ext cx="4800600" cy="274320"/>
+          </a:xfrm>
+          <a:prstGeom prst="rect">
+            <a:avLst/>
+          </a:prstGeom>
+          <a:noFill/>
+          <a:ln/>
+        </p:spPr>
+        <p:txBody>
+          <a:bodyPr wrap="square" lIns="0" tIns="0" rIns="0" bIns="0" rtlCol="0" anchor="ctr"/>
+          <a:lstStyle/>
+          <a:p>
+            <a:pPr indent="0" marL="0">
+              <a:buNone/>
+            </a:pPr>
+            <a:r>
+              <a:rPr lang="en-US" sz="1150" dirty="0">
+                <a:solidFill>
+                  <a:srgbClr val="5A6B72"/>
+                </a:solidFill>
+                <a:latin typeface="Calibri" pitchFamily="34" charset="0"/>
+                <a:ea typeface="Calibri" pitchFamily="34" charset="-122"/>
+                <a:cs typeface="Calibri" pitchFamily="34" charset="-120"/>
+              </a:rPr>
+              <a:t>Authorization complete — and before arrival</a:t>
+            </a:r>
+            <a:endParaRPr lang="en-US" sz="1150" dirty="0"/>
+          </a:p>
+        </p:txBody>
+      </p:sp>
+      <p:sp>
+        <p:nvSpPr>
+          <p:cNvPr id="19" name="Shape 17"/>
+          <p:cNvSpPr/>
+          <p:nvPr/>
+        </p:nvSpPr>
+        <p:spPr>
+          <a:xfrm>
+            <a:off x="566928" y="4645152"/>
+            <a:ext cx="118872" cy="118872"/>
+          </a:xfrm>
+          <a:prstGeom prst="ellipse">
+            <a:avLst/>
+          </a:prstGeom>
+          <a:solidFill>
+            <a:srgbClr val="7FA99B"/>
+          </a:solidFill>
+          <a:ln/>
+        </p:spPr>
+      </p:sp>
+      <p:sp>
+        <p:nvSpPr>
+          <p:cNvPr id="20" name="Text 18"/>
+          <p:cNvSpPr/>
+          <p:nvPr/>
+        </p:nvSpPr>
+        <p:spPr>
+          <a:xfrm>
+            <a:off x="841248" y="4572000"/>
+            <a:ext cx="1755648" cy="274320"/>
+          </a:xfrm>
+          <a:prstGeom prst="rect">
+            <a:avLst/>
+          </a:prstGeom>
+          <a:noFill/>
+          <a:ln/>
+        </p:spPr>
+        <p:txBody>
+          <a:bodyPr wrap="square" lIns="0" tIns="0" rIns="0" bIns="0" rtlCol="0" anchor="ctr"/>
+          <a:lstStyle/>
+          <a:p>
+            <a:pPr indent="0" marL="0">
+              <a:buNone/>
+            </a:pPr>
+            <a:r>
+              <a:rPr lang="en-US" sz="1150" b="1" dirty="0">
+                <a:solidFill>
+                  <a:srgbClr val="12212B"/>
+                </a:solidFill>
+                <a:latin typeface="Calibri" pitchFamily="34" charset="0"/>
+                <a:ea typeface="Calibri" pitchFamily="34" charset="-122"/>
+                <a:cs typeface="Calibri" pitchFamily="34" charset="-120"/>
+              </a:rPr>
+              <a:t>Monthly, NLT 16th</a:t>
+            </a:r>
+            <a:endParaRPr lang="en-US" sz="1150" dirty="0"/>
+          </a:p>
+        </p:txBody>
+      </p:sp>
+      <p:sp>
+        <p:nvSpPr>
+          <p:cNvPr id="21" name="Text 19"/>
+          <p:cNvSpPr/>
+          <p:nvPr/>
+        </p:nvSpPr>
+        <p:spPr>
+          <a:xfrm>
+            <a:off x="2670048" y="4572000"/>
+            <a:ext cx="4800600" cy="274320"/>
+          </a:xfrm>
+          <a:prstGeom prst="rect">
+            <a:avLst/>
+          </a:prstGeom>
+          <a:noFill/>
+          <a:ln/>
+        </p:spPr>
+        <p:txBody>
+          <a:bodyPr wrap="square" lIns="0" tIns="0" rIns="0" bIns="0" rtlCol="0" anchor="ctr"/>
+          <a:lstStyle/>
+          <a:p>
+            <a:pPr indent="0" marL="0">
+              <a:buNone/>
+            </a:pPr>
+            <a:r>
+              <a:rPr lang="en-US" sz="1150" dirty="0">
+                <a:solidFill>
+                  <a:srgbClr val="5A6B72"/>
+                </a:solidFill>
+                <a:latin typeface="Calibri" pitchFamily="34" charset="0"/>
+                <a:ea typeface="Calibri" pitchFamily="34" charset="-122"/>
+                <a:cs typeface="Calibri" pitchFamily="34" charset="-120"/>
+              </a:rPr>
+              <a:t>Data call to the Network lead</a:t>
+            </a:r>
+            <a:endParaRPr lang="en-US" sz="1150" dirty="0"/>
+          </a:p>
+        </p:txBody>
+      </p:sp>
+      <p:sp>
+        <p:nvSpPr>
+          <p:cNvPr id="22" name="Shape 20"/>
+          <p:cNvSpPr/>
+          <p:nvPr/>
+        </p:nvSpPr>
+        <p:spPr>
+          <a:xfrm>
+            <a:off x="7699248" y="1691640"/>
+            <a:ext cx="3749040" cy="2084832"/>
           </a:xfrm>
           <a:prstGeom prst="roundRect">
             <a:avLst>
-              <a:gd name="adj" fmla="val 4762"/>
+              <a:gd name="adj" fmla="val 2632"/>
             </a:avLst>
           </a:prstGeom>
           <a:solidFill>
@@ -5221,7 +5694,7 @@
           </a:solidFill>
           <a:ln w="12700">
             <a:solidFill>
-              <a:srgbClr val="C25E3A"/>
+              <a:srgbClr val="FDF3EE"/>
             </a:solidFill>
             <a:prstDash val="solid"/>
           </a:ln>
@@ -5229,44 +5702,94 @@
       </p:sp>
       <p:sp>
         <p:nvSpPr>
-          <p:cNvPr id="9" name="Text 7"/>
-          <p:cNvSpPr/>
-          <p:nvPr/>
-        </p:nvSpPr>
-        <p:spPr>
-          <a:xfrm>
-            <a:off x="914400" y="1783080"/>
-            <a:ext cx="10149840" cy="960120"/>
-          </a:xfrm>
-          <a:prstGeom prst="rect">
-            <a:avLst/>
-          </a:prstGeom>
-          <a:noFill/>
-          <a:ln/>
-        </p:spPr>
-        <p:txBody>
-          <a:bodyPr wrap="square" lIns="0" tIns="0" rIns="0" bIns="0" rtlCol="0" anchor="ctr"/>
-          <a:lstStyle/>
-          <a:p>
-            <a:pPr indent="0" marL="0">
-              <a:buNone/>
-            </a:pPr>
-            <a:r>
-              <a:rPr lang="en-US" sz="1250" b="1" dirty="0">
+          <p:cNvPr id="23" name="Text 21"/>
+          <p:cNvSpPr/>
+          <p:nvPr/>
+        </p:nvSpPr>
+        <p:spPr>
+          <a:xfrm>
+            <a:off x="7973568" y="1947672"/>
+            <a:ext cx="3200400" cy="365760"/>
+          </a:xfrm>
+          <a:prstGeom prst="rect">
+            <a:avLst/>
+          </a:prstGeom>
+          <a:noFill/>
+          <a:ln/>
+        </p:spPr>
+        <p:txBody>
+          <a:bodyPr wrap="square" lIns="0" tIns="0" rIns="0" bIns="0" rtlCol="0" anchor="ctr"/>
+          <a:lstStyle/>
+          <a:p>
+            <a:pPr indent="0" marL="0">
+              <a:buNone/>
+            </a:pPr>
+            <a:r>
+              <a:rPr lang="en-US" sz="1400" b="1" dirty="0">
                 <a:solidFill>
                   <a:srgbClr val="C25E3A"/>
+                </a:solidFill>
+                <a:latin typeface="Cambria" pitchFamily="34" charset="0"/>
+                <a:ea typeface="Cambria" pitchFamily="34" charset="-122"/>
+                <a:cs typeface="Cambria" pitchFamily="34" charset="-120"/>
+              </a:rPr>
+              <a:t>Two hard stops</a:t>
+            </a:r>
+            <a:endParaRPr lang="en-US" sz="1400" dirty="0"/>
+          </a:p>
+        </p:txBody>
+      </p:sp>
+      <p:sp>
+        <p:nvSpPr>
+          <p:cNvPr id="24" name="Text 22"/>
+          <p:cNvSpPr/>
+          <p:nvPr/>
+        </p:nvSpPr>
+        <p:spPr>
+          <a:xfrm>
+            <a:off x="7973568" y="2404872"/>
+            <a:ext cx="3200400" cy="1124712"/>
+          </a:xfrm>
+          <a:prstGeom prst="rect">
+            <a:avLst/>
+          </a:prstGeom>
+          <a:noFill/>
+          <a:ln/>
+        </p:spPr>
+        <p:txBody>
+          <a:bodyPr wrap="square" lIns="0" tIns="0" rIns="0" bIns="0" rtlCol="0" anchor="t"/>
+          <a:lstStyle/>
+          <a:p>
+            <a:pPr marL="342900" indent="-342900">
+              <a:spcAft>
+                <a:spcPts val="500"/>
+              </a:spcAft>
+              <a:buSzPct val="100000"/>
+              <a:buChar char="•"/>
+            </a:pPr>
+            <a:r>
+              <a:rPr lang="en-US" sz="1050" dirty="0">
+                <a:solidFill>
+                  <a:srgbClr val="5A6B72"/>
                 </a:solidFill>
                 <a:latin typeface="Calibri" pitchFamily="34" charset="0"/>
                 <a:ea typeface="Calibri" pitchFamily="34" charset="-122"/>
                 <a:cs typeface="Calibri" pitchFamily="34" charset="-120"/>
               </a:rPr>
-              <a:t>CONTENT PENDING.  </a:t>
-            </a:r>
-            <a:pPr indent="0" marL="0">
-              <a:buNone/>
-            </a:pPr>
-            <a:r>
-              <a:rPr lang="en-US" sz="1250" dirty="0">
+              <a:t>Privileges expiring within 90 days — stop EWP, revert to legacy privileging</a:t>
+            </a:r>
+            <a:endParaRPr lang="en-US" sz="1050" dirty="0"/>
+          </a:p>
+          <a:p>
+            <a:pPr marL="342900" indent="-342900">
+              <a:spcAft>
+                <a:spcPts val="500"/>
+              </a:spcAft>
+              <a:buSzPct val="100000"/>
+              <a:buChar char="•"/>
+            </a:pPr>
+            <a:r>
+              <a:rPr lang="en-US" sz="1050" dirty="0">
                 <a:solidFill>
                   <a:srgbClr val="5A6B72"/>
                 </a:solidFill>
@@ -5274,26 +5797,26 @@
                 <a:ea typeface="Calibri" pitchFamily="34" charset="-122"/>
                 <a:cs typeface="Calibri" pitchFamily="34" charset="-120"/>
               </a:rPr>
-              <a:t>This slide is scaffolded against the structure used for the other two lines of effort. Supply the EWP project material and it populates without touching the rest of the deck.</a:t>
-            </a:r>
-            <a:endParaRPr lang="en-US" sz="1250" dirty="0"/>
-          </a:p>
-        </p:txBody>
-      </p:sp>
-      <p:sp>
-        <p:nvSpPr>
-          <p:cNvPr id="10" name="Shape 8"/>
-          <p:cNvSpPr/>
-          <p:nvPr/>
-        </p:nvSpPr>
-        <p:spPr>
-          <a:xfrm>
-            <a:off x="566928" y="2971800"/>
-            <a:ext cx="5257800" cy="1371600"/>
+              <a:t>Supervised privileges bound for an operational assignment — operational platforms cannot host them</a:t>
+            </a:r>
+            <a:endParaRPr lang="en-US" sz="1050" dirty="0"/>
+          </a:p>
+        </p:txBody>
+      </p:sp>
+      <p:sp>
+        <p:nvSpPr>
+          <p:cNvPr id="25" name="Shape 23"/>
+          <p:cNvSpPr/>
+          <p:nvPr/>
+        </p:nvSpPr>
+        <p:spPr>
+          <a:xfrm>
+            <a:off x="7699248" y="3913632"/>
+            <a:ext cx="3749040" cy="2048256"/>
           </a:xfrm>
           <a:prstGeom prst="roundRect">
             <a:avLst>
-              <a:gd name="adj" fmla="val 4000"/>
+              <a:gd name="adj" fmla="val 2679"/>
             </a:avLst>
           </a:prstGeom>
           <a:solidFill>
@@ -5309,53 +5832,53 @@
       </p:sp>
       <p:sp>
         <p:nvSpPr>
-          <p:cNvPr id="11" name="Text 9"/>
-          <p:cNvSpPr/>
-          <p:nvPr/>
-        </p:nvSpPr>
-        <p:spPr>
-          <a:xfrm>
-            <a:off x="841248" y="3227832"/>
-            <a:ext cx="4709160" cy="365760"/>
-          </a:xfrm>
-          <a:prstGeom prst="rect">
-            <a:avLst/>
-          </a:prstGeom>
-          <a:noFill/>
-          <a:ln/>
-        </p:spPr>
-        <p:txBody>
-          <a:bodyPr wrap="square" lIns="0" tIns="0" rIns="0" bIns="0" rtlCol="0" anchor="ctr"/>
-          <a:lstStyle/>
-          <a:p>
-            <a:pPr indent="0" marL="0">
-              <a:buNone/>
-            </a:pPr>
-            <a:r>
-              <a:rPr lang="en-US" sz="1500" b="1" dirty="0">
-                <a:solidFill>
-                  <a:srgbClr val="12212B"/>
+          <p:cNvPr id="26" name="Text 24"/>
+          <p:cNvSpPr/>
+          <p:nvPr/>
+        </p:nvSpPr>
+        <p:spPr>
+          <a:xfrm>
+            <a:off x="7973568" y="4169664"/>
+            <a:ext cx="3200400" cy="365760"/>
+          </a:xfrm>
+          <a:prstGeom prst="rect">
+            <a:avLst/>
+          </a:prstGeom>
+          <a:noFill/>
+          <a:ln/>
+        </p:spPr>
+        <p:txBody>
+          <a:bodyPr wrap="square" lIns="0" tIns="0" rIns="0" bIns="0" rtlCol="0" anchor="ctr"/>
+          <a:lstStyle/>
+          <a:p>
+            <a:pPr indent="0" marL="0">
+              <a:buNone/>
+            </a:pPr>
+            <a:r>
+              <a:rPr lang="en-US" sz="1400" b="1" dirty="0">
+                <a:solidFill>
+                  <a:srgbClr val="1C5D66"/>
                 </a:solidFill>
                 <a:latin typeface="Cambria" pitchFamily="34" charset="0"/>
                 <a:ea typeface="Cambria" pitchFamily="34" charset="-122"/>
                 <a:cs typeface="Cambria" pitchFamily="34" charset="-120"/>
               </a:rPr>
-              <a:t>Objective</a:t>
-            </a:r>
-            <a:endParaRPr lang="en-US" sz="1500" dirty="0"/>
-          </a:p>
-        </p:txBody>
-      </p:sp>
-      <p:sp>
-        <p:nvSpPr>
-          <p:cNvPr id="12" name="Text 10"/>
-          <p:cNvSpPr/>
-          <p:nvPr/>
-        </p:nvSpPr>
-        <p:spPr>
-          <a:xfrm>
-            <a:off x="841248" y="3685032"/>
-            <a:ext cx="4709160" cy="411480"/>
+              <a:t>I MEF posture</a:t>
+            </a:r>
+            <a:endParaRPr lang="en-US" sz="1400" dirty="0"/>
+          </a:p>
+        </p:txBody>
+      </p:sp>
+      <p:sp>
+        <p:nvSpPr>
+          <p:cNvPr id="27" name="Text 25"/>
+          <p:cNvSpPr/>
+          <p:nvPr/>
+        </p:nvSpPr>
+        <p:spPr>
+          <a:xfrm>
+            <a:off x="7973568" y="4626864"/>
+            <a:ext cx="3200400" cy="1088136"/>
           </a:xfrm>
           <a:prstGeom prst="rect">
             <a:avLst/>
@@ -5367,11 +5890,15 @@
           <a:bodyPr wrap="square" lIns="0" tIns="0" rIns="0" bIns="0" rtlCol="0" anchor="t"/>
           <a:lstStyle/>
           <a:p>
-            <a:pPr indent="0" marL="0">
-              <a:buNone/>
-            </a:pPr>
-            <a:r>
-              <a:rPr lang="en-US" sz="1150" dirty="0">
+            <a:pPr marL="342900" indent="-342900">
+              <a:spcAft>
+                <a:spcPts val="500"/>
+              </a:spcAft>
+              <a:buSzPct val="100000"/>
+              <a:buChar char="•"/>
+            </a:pPr>
+            <a:r>
+              <a:rPr lang="en-US" sz="1050" dirty="0">
                 <a:solidFill>
                   <a:srgbClr val="5A6B72"/>
                 </a:solidFill>
@@ -5379,26 +5906,89 @@
                 <a:ea typeface="Calibri" pitchFamily="34" charset="-122"/>
                 <a:cs typeface="Calibri" pitchFamily="34" charset="-120"/>
               </a:rPr>
-              <a:t>What the effort is for, in one sentence a non-medical action officer can repeat.</a:t>
-            </a:r>
-            <a:endParaRPr lang="en-US" sz="1150" dirty="0"/>
-          </a:p>
-        </p:txBody>
-      </p:sp>
-      <p:sp>
-        <p:nvSpPr>
-          <p:cNvPr id="13" name="Shape 11"/>
-          <p:cNvSpPr/>
-          <p:nvPr/>
-        </p:nvSpPr>
-        <p:spPr>
-          <a:xfrm>
-            <a:off x="6190488" y="2971800"/>
-            <a:ext cx="5257800" cy="1371600"/>
+              <a:t>PA is the I MEF Surgeon, delegated from the Medical Officer of the Marine Corps</a:t>
+            </a:r>
+            <a:endParaRPr lang="en-US" sz="1050" dirty="0"/>
+          </a:p>
+          <a:p>
+            <a:pPr marL="342900" indent="-342900">
+              <a:spcAft>
+                <a:spcPts val="500"/>
+              </a:spcAft>
+              <a:buSzPct val="100000"/>
+              <a:buChar char="•"/>
+            </a:pPr>
+            <a:r>
+              <a:rPr lang="en-US" sz="1050" dirty="0">
+                <a:solidFill>
+                  <a:srgbClr val="5A6B72"/>
+                </a:solidFill>
+                <a:latin typeface="Calibri" pitchFamily="34" charset="0"/>
+                <a:ea typeface="Calibri" pitchFamily="34" charset="-122"/>
+                <a:cs typeface="Calibri" pitchFamily="34" charset="-120"/>
+              </a:rPr>
+              <a:t>MEC is quarterly — not a fast path</a:t>
+            </a:r>
+            <a:endParaRPr lang="en-US" sz="1050" dirty="0"/>
+          </a:p>
+          <a:p>
+            <a:pPr marL="342900" indent="-342900">
+              <a:spcAft>
+                <a:spcPts val="500"/>
+              </a:spcAft>
+              <a:buSzPct val="100000"/>
+              <a:buChar char="•"/>
+            </a:pPr>
+            <a:r>
+              <a:rPr lang="en-US" sz="1050" dirty="0">
+                <a:solidFill>
+                  <a:srgbClr val="5A6B72"/>
+                </a:solidFill>
+                <a:latin typeface="Calibri" pitchFamily="34" charset="0"/>
+                <a:ea typeface="Calibri" pitchFamily="34" charset="-122"/>
+                <a:cs typeface="Calibri" pitchFamily="34" charset="-120"/>
+              </a:rPr>
+              <a:t>No local bylaws modifying the DHA baseline</a:t>
+            </a:r>
+            <a:endParaRPr lang="en-US" sz="1050" dirty="0"/>
+          </a:p>
+          <a:p>
+            <a:pPr marL="342900" indent="-342900">
+              <a:spcAft>
+                <a:spcPts val="500"/>
+              </a:spcAft>
+              <a:buSzPct val="100000"/>
+              <a:buChar char="•"/>
+            </a:pPr>
+            <a:r>
+              <a:rPr lang="en-US" sz="1050" dirty="0">
+                <a:solidFill>
+                  <a:srgbClr val="5A6B72"/>
+                </a:solidFill>
+                <a:latin typeface="Calibri" pitchFamily="34" charset="0"/>
+                <a:ea typeface="Calibri" pitchFamily="34" charset="-122"/>
+                <a:cs typeface="Calibri" pitchFamily="34" charset="-120"/>
+              </a:rPr>
+              <a:t>Reserve Component in scope since 27 May 2026</a:t>
+            </a:r>
+            <a:endParaRPr lang="en-US" sz="1050" dirty="0"/>
+          </a:p>
+        </p:txBody>
+      </p:sp>
+      <p:sp>
+        <p:nvSpPr>
+          <p:cNvPr id="28" name="Shape 26"/>
+          <p:cNvSpPr/>
+          <p:nvPr/>
+        </p:nvSpPr>
+        <p:spPr>
+          <a:xfrm>
+            <a:off x="566928" y="4919472"/>
+            <a:ext cx="3328416" cy="1353312"/>
           </a:xfrm>
           <a:prstGeom prst="roundRect">
             <a:avLst>
-              <a:gd name="adj" fmla="val 4000"/>
+              <a:gd name="adj" fmla="val 4054"/>
             </a:avLst>
           </a:prstGeom>
           <a:solidFill>
@@ -5414,53 +6004,53 @@
       </p:sp>
       <p:sp>
         <p:nvSpPr>
-          <p:cNvPr id="14" name="Text 12"/>
-          <p:cNvSpPr/>
-          <p:nvPr/>
-        </p:nvSpPr>
-        <p:spPr>
-          <a:xfrm>
-            <a:off x="6464808" y="3227832"/>
-            <a:ext cx="4709160" cy="365760"/>
-          </a:xfrm>
-          <a:prstGeom prst="rect">
-            <a:avLst/>
-          </a:prstGeom>
-          <a:noFill/>
-          <a:ln/>
-        </p:spPr>
-        <p:txBody>
-          <a:bodyPr wrap="square" lIns="0" tIns="0" rIns="0" bIns="0" rtlCol="0" anchor="ctr"/>
-          <a:lstStyle/>
-          <a:p>
-            <a:pPr indent="0" marL="0">
-              <a:buNone/>
-            </a:pPr>
-            <a:r>
-              <a:rPr lang="en-US" sz="1500" b="1" dirty="0">
-                <a:solidFill>
-                  <a:srgbClr val="12212B"/>
+          <p:cNvPr id="29" name="Text 27"/>
+          <p:cNvSpPr/>
+          <p:nvPr/>
+        </p:nvSpPr>
+        <p:spPr>
+          <a:xfrm>
+            <a:off x="841248" y="5175504"/>
+            <a:ext cx="2779776" cy="365760"/>
+          </a:xfrm>
+          <a:prstGeom prst="rect">
+            <a:avLst/>
+          </a:prstGeom>
+          <a:noFill/>
+          <a:ln/>
+        </p:spPr>
+        <p:txBody>
+          <a:bodyPr wrap="square" lIns="0" tIns="0" rIns="0" bIns="0" rtlCol="0" anchor="ctr"/>
+          <a:lstStyle/>
+          <a:p>
+            <a:pPr indent="0" marL="0">
+              <a:buNone/>
+            </a:pPr>
+            <a:r>
+              <a:rPr lang="en-US" sz="1300" b="1" dirty="0">
+                <a:solidFill>
+                  <a:srgbClr val="1C5D66"/>
                 </a:solidFill>
                 <a:latin typeface="Cambria" pitchFamily="34" charset="0"/>
                 <a:ea typeface="Cambria" pitchFamily="34" charset="-122"/>
                 <a:cs typeface="Cambria" pitchFamily="34" charset="-120"/>
               </a:rPr>
-              <a:t>Current state</a:t>
-            </a:r>
-            <a:endParaRPr lang="en-US" sz="1500" dirty="0"/>
-          </a:p>
-        </p:txBody>
-      </p:sp>
-      <p:sp>
-        <p:nvSpPr>
-          <p:cNvPr id="15" name="Text 13"/>
-          <p:cNvSpPr/>
-          <p:nvPr/>
-        </p:nvSpPr>
-        <p:spPr>
-          <a:xfrm>
-            <a:off x="6464808" y="3685032"/>
-            <a:ext cx="4709160" cy="411480"/>
+              <a:t>DHA Form 456</a:t>
+            </a:r>
+            <a:endParaRPr lang="en-US" sz="1300" dirty="0"/>
+          </a:p>
+        </p:txBody>
+      </p:sp>
+      <p:sp>
+        <p:nvSpPr>
+          <p:cNvPr id="30" name="Text 28"/>
+          <p:cNvSpPr/>
+          <p:nvPr/>
+        </p:nvSpPr>
+        <p:spPr>
+          <a:xfrm>
+            <a:off x="841248" y="5632704"/>
+            <a:ext cx="2779776" cy="393192"/>
           </a:xfrm>
           <a:prstGeom prst="rect">
             <a:avLst/>
@@ -5476,7 +6066,7 @@
               <a:buNone/>
             </a:pPr>
             <a:r>
-              <a:rPr lang="en-US" sz="1150" dirty="0">
+              <a:rPr lang="en-US" sz="950" dirty="0">
                 <a:solidFill>
                   <a:srgbClr val="5A6B72"/>
                 </a:solidFill>
@@ -5484,26 +6074,26 @@
                 <a:ea typeface="Calibri" pitchFamily="34" charset="-122"/>
                 <a:cs typeface="Calibri" pitchFamily="34" charset="-120"/>
               </a:rPr>
-              <a:t>Where it stands now — what exists, what is in work, what is blocked.</a:t>
-            </a:r>
-            <a:endParaRPr lang="en-US" sz="1150" dirty="0"/>
-          </a:p>
-        </p:txBody>
-      </p:sp>
-      <p:sp>
-        <p:nvSpPr>
-          <p:cNvPr id="16" name="Shape 14"/>
-          <p:cNvSpPr/>
-          <p:nvPr/>
-        </p:nvSpPr>
-        <p:spPr>
-          <a:xfrm>
-            <a:off x="566928" y="4544568"/>
-            <a:ext cx="5257800" cy="1371600"/>
+              <a:t>Authorization to practice + attestation, signed before arrival. No clinician practices without it; its signature date is the metrics completion marker.</a:t>
+            </a:r>
+            <a:endParaRPr lang="en-US" sz="950" dirty="0"/>
+          </a:p>
+        </p:txBody>
+      </p:sp>
+      <p:sp>
+        <p:nvSpPr>
+          <p:cNvPr id="31" name="Shape 29"/>
+          <p:cNvSpPr/>
+          <p:nvPr/>
+        </p:nvSpPr>
+        <p:spPr>
+          <a:xfrm>
+            <a:off x="4169664" y="4919472"/>
+            <a:ext cx="3328416" cy="1353312"/>
           </a:xfrm>
           <a:prstGeom prst="roundRect">
             <a:avLst>
-              <a:gd name="adj" fmla="val 4000"/>
+              <a:gd name="adj" fmla="val 4054"/>
             </a:avLst>
           </a:prstGeom>
           <a:solidFill>
@@ -5519,53 +6109,53 @@
       </p:sp>
       <p:sp>
         <p:nvSpPr>
-          <p:cNvPr id="17" name="Text 15"/>
-          <p:cNvSpPr/>
-          <p:nvPr/>
-        </p:nvSpPr>
-        <p:spPr>
-          <a:xfrm>
-            <a:off x="841248" y="4800600"/>
-            <a:ext cx="4709160" cy="365760"/>
-          </a:xfrm>
-          <a:prstGeom prst="rect">
-            <a:avLst/>
-          </a:prstGeom>
-          <a:noFill/>
-          <a:ln/>
-        </p:spPr>
-        <p:txBody>
-          <a:bodyPr wrap="square" lIns="0" tIns="0" rIns="0" bIns="0" rtlCol="0" anchor="ctr"/>
-          <a:lstStyle/>
-          <a:p>
-            <a:pPr indent="0" marL="0">
-              <a:buNone/>
-            </a:pPr>
-            <a:r>
-              <a:rPr lang="en-US" sz="1500" b="1" dirty="0">
-                <a:solidFill>
-                  <a:srgbClr val="12212B"/>
+          <p:cNvPr id="32" name="Text 30"/>
+          <p:cNvSpPr/>
+          <p:nvPr/>
+        </p:nvSpPr>
+        <p:spPr>
+          <a:xfrm>
+            <a:off x="4443984" y="5175504"/>
+            <a:ext cx="2779776" cy="365760"/>
+          </a:xfrm>
+          <a:prstGeom prst="rect">
+            <a:avLst/>
+          </a:prstGeom>
+          <a:noFill/>
+          <a:ln/>
+        </p:spPr>
+        <p:txBody>
+          <a:bodyPr wrap="square" lIns="0" tIns="0" rIns="0" bIns="0" rtlCol="0" anchor="ctr"/>
+          <a:lstStyle/>
+          <a:p>
+            <a:pPr indent="0" marL="0">
+              <a:buNone/>
+            </a:pPr>
+            <a:r>
+              <a:rPr lang="en-US" sz="1300" b="1" dirty="0">
+                <a:solidFill>
+                  <a:srgbClr val="C25E3A"/>
                 </a:solidFill>
                 <a:latin typeface="Cambria" pitchFamily="34" charset="0"/>
                 <a:ea typeface="Cambria" pitchFamily="34" charset="-122"/>
                 <a:cs typeface="Cambria" pitchFamily="34" charset="-120"/>
               </a:rPr>
-              <a:t>Output</a:t>
-            </a:r>
-            <a:endParaRPr lang="en-US" sz="1500" dirty="0"/>
-          </a:p>
-        </p:txBody>
-      </p:sp>
-      <p:sp>
-        <p:nvSpPr>
-          <p:cNvPr id="18" name="Text 16"/>
-          <p:cNvSpPr/>
-          <p:nvPr/>
-        </p:nvSpPr>
-        <p:spPr>
-          <a:xfrm>
-            <a:off x="841248" y="5257800"/>
-            <a:ext cx="4709160" cy="411480"/>
+              <a:t>DHA Form 455</a:t>
+            </a:r>
+            <a:endParaRPr lang="en-US" sz="1300" dirty="0"/>
+          </a:p>
+        </p:txBody>
+      </p:sp>
+      <p:sp>
+        <p:nvSpPr>
+          <p:cNvPr id="33" name="Text 31"/>
+          <p:cNvSpPr/>
+          <p:nvPr/>
+        </p:nvSpPr>
+        <p:spPr>
+          <a:xfrm>
+            <a:off x="4443984" y="5632704"/>
+            <a:ext cx="2779776" cy="393192"/>
           </a:xfrm>
           <a:prstGeom prst="rect">
             <a:avLst/>
@@ -5581,7 +6171,7 @@
               <a:buNone/>
             </a:pPr>
             <a:r>
-              <a:rPr lang="en-US" sz="1150" dirty="0">
+              <a:rPr lang="en-US" sz="950" dirty="0">
                 <a:solidFill>
                   <a:srgbClr val="5A6B72"/>
                 </a:solidFill>
@@ -5589,151 +6179,46 @@
                 <a:ea typeface="Calibri" pitchFamily="34" charset="-122"/>
                 <a:cs typeface="Calibri" pitchFamily="34" charset="-120"/>
               </a:rPr>
-              <a:t>What it produces that CSC, simulation, or Measure Dx consumes.</a:t>
-            </a:r>
-            <a:endParaRPr lang="en-US" sz="1150" dirty="0"/>
-          </a:p>
-        </p:txBody>
-      </p:sp>
-      <p:sp>
-        <p:nvSpPr>
-          <p:cNvPr id="19" name="Shape 17"/>
-          <p:cNvSpPr/>
-          <p:nvPr/>
-        </p:nvSpPr>
-        <p:spPr>
-          <a:xfrm>
-            <a:off x="6190488" y="4544568"/>
-            <a:ext cx="5257800" cy="1371600"/>
-          </a:xfrm>
-          <a:prstGeom prst="roundRect">
-            <a:avLst>
-              <a:gd name="adj" fmla="val 4000"/>
-            </a:avLst>
-          </a:prstGeom>
-          <a:solidFill>
-            <a:srgbClr val="F2F5F4"/>
-          </a:solidFill>
-          <a:ln w="12700">
-            <a:solidFill>
-              <a:srgbClr val="F2F5F4"/>
-            </a:solidFill>
-            <a:prstDash val="solid"/>
-          </a:ln>
-        </p:spPr>
-      </p:sp>
-      <p:sp>
-        <p:nvSpPr>
-          <p:cNvPr id="20" name="Text 18"/>
-          <p:cNvSpPr/>
-          <p:nvPr/>
-        </p:nvSpPr>
-        <p:spPr>
-          <a:xfrm>
-            <a:off x="6464808" y="4800600"/>
-            <a:ext cx="4709160" cy="365760"/>
-          </a:xfrm>
-          <a:prstGeom prst="rect">
-            <a:avLst/>
-          </a:prstGeom>
-          <a:noFill/>
-          <a:ln/>
-        </p:spPr>
-        <p:txBody>
-          <a:bodyPr wrap="square" lIns="0" tIns="0" rIns="0" bIns="0" rtlCol="0" anchor="ctr"/>
-          <a:lstStyle/>
-          <a:p>
-            <a:pPr indent="0" marL="0">
-              <a:buNone/>
-            </a:pPr>
-            <a:r>
-              <a:rPr lang="en-US" sz="1500" b="1" dirty="0">
-                <a:solidFill>
-                  <a:srgbClr val="12212B"/>
-                </a:solidFill>
-                <a:latin typeface="Cambria" pitchFamily="34" charset="0"/>
-                <a:ea typeface="Cambria" pitchFamily="34" charset="-122"/>
-                <a:cs typeface="Cambria" pitchFamily="34" charset="-120"/>
-              </a:rPr>
-              <a:t>Ask</a:t>
-            </a:r>
-            <a:endParaRPr lang="en-US" sz="1500" dirty="0"/>
-          </a:p>
-        </p:txBody>
-      </p:sp>
-      <p:sp>
-        <p:nvSpPr>
-          <p:cNvPr id="21" name="Text 19"/>
-          <p:cNvSpPr/>
-          <p:nvPr/>
-        </p:nvSpPr>
-        <p:spPr>
-          <a:xfrm>
-            <a:off x="6464808" y="5257800"/>
-            <a:ext cx="4709160" cy="411480"/>
-          </a:xfrm>
-          <a:prstGeom prst="rect">
-            <a:avLst/>
-          </a:prstGeom>
-          <a:noFill/>
-          <a:ln/>
-        </p:spPr>
-        <p:txBody>
-          <a:bodyPr wrap="square" lIns="0" tIns="0" rIns="0" bIns="0" rtlCol="0" anchor="t"/>
-          <a:lstStyle/>
-          <a:p>
-            <a:pPr indent="0" marL="0">
-              <a:buNone/>
-            </a:pPr>
-            <a:r>
-              <a:rPr lang="en-US" sz="1150" dirty="0">
-                <a:solidFill>
-                  <a:srgbClr val="5A6B72"/>
+              <a:t>The Performance Assessment Report. Clinical supervisor completes it on PCS or TDY over two weeks. Supersedes all MILDEP and CCQAS PARs — scaffold it, never author it.</a:t>
+            </a:r>
+            <a:endParaRPr lang="en-US" sz="950" dirty="0"/>
+          </a:p>
+        </p:txBody>
+      </p:sp>
+      <p:sp>
+        <p:nvSpPr>
+          <p:cNvPr id="34" name="Text 32"/>
+          <p:cNvSpPr/>
+          <p:nvPr/>
+        </p:nvSpPr>
+        <p:spPr>
+          <a:xfrm>
+            <a:off x="566928" y="6382512"/>
+            <a:ext cx="10515600" cy="219456"/>
+          </a:xfrm>
+          <a:prstGeom prst="rect">
+            <a:avLst/>
+          </a:prstGeom>
+          <a:noFill/>
+          <a:ln/>
+        </p:spPr>
+        <p:txBody>
+          <a:bodyPr wrap="square" lIns="0" tIns="0" rIns="0" bIns="0" rtlCol="0" anchor="ctr"/>
+          <a:lstStyle/>
+          <a:p>
+            <a:pPr indent="0" marL="0">
+              <a:buNone/>
+            </a:pPr>
+            <a:r>
+              <a:rPr lang="en-US" sz="900" i="1" dirty="0">
+                <a:solidFill>
+                  <a:srgbClr val="C9D6DB"/>
                 </a:solidFill>
                 <a:latin typeface="Calibri" pitchFamily="34" charset="0"/>
                 <a:ea typeface="Calibri" pitchFamily="34" charset="-122"/>
                 <a:cs typeface="Calibri" pitchFamily="34" charset="-120"/>
               </a:rPr>
-              <a:t>The decision, endorsement, or resourcing sought at HSOAG.</a:t>
-            </a:r>
-            <a:endParaRPr lang="en-US" sz="1150" dirty="0"/>
-          </a:p>
-        </p:txBody>
-      </p:sp>
-      <p:sp>
-        <p:nvSpPr>
-          <p:cNvPr id="22" name="Text 20"/>
-          <p:cNvSpPr/>
-          <p:nvPr/>
-        </p:nvSpPr>
-        <p:spPr>
-          <a:xfrm>
-            <a:off x="566928" y="6382512"/>
-            <a:ext cx="10515600" cy="219456"/>
-          </a:xfrm>
-          <a:prstGeom prst="rect">
-            <a:avLst/>
-          </a:prstGeom>
-          <a:noFill/>
-          <a:ln/>
-        </p:spPr>
-        <p:txBody>
-          <a:bodyPr wrap="square" lIns="0" tIns="0" rIns="0" bIns="0" rtlCol="0" anchor="ctr"/>
-          <a:lstStyle/>
-          <a:p>
-            <a:pPr indent="0" marL="0">
-              <a:buNone/>
-            </a:pPr>
-            <a:r>
-              <a:rPr lang="en-US" sz="900" i="1" dirty="0">
-                <a:solidFill>
-                  <a:srgbClr val="C9D6DB"/>
-                </a:solidFill>
-                <a:latin typeface="Calibri" pitchFamily="34" charset="0"/>
-                <a:ea typeface="Calibri" pitchFamily="34" charset="-122"/>
-                <a:cs typeface="Calibri" pitchFamily="34" charset="-120"/>
-              </a:rPr>
-              <a:t>Placeholder structure — replace with EWP project content.</a:t>
+              <a:t>Source: DHA-PM 6025.13 Vol 8 (21 Oct 2025); BUMEDNOTE 6000 (25 Nov 2025); DHA Form 455 PAR fact sheet. All C&amp;P content is MQA information under 10 U.S.C. §1102 and CUI.</a:t>
             </a:r>
             <a:endParaRPr lang="en-US" sz="900" dirty="0"/>
           </a:p>
@@ -10477,8 +10962,8 @@
         </p:nvSpPr>
         <p:spPr>
           <a:xfrm>
-            <a:off x="566928" y="1993392"/>
-            <a:ext cx="64008" cy="1051560"/>
+            <a:off x="566928" y="1856232"/>
+            <a:ext cx="64008" cy="914400"/>
           </a:xfrm>
           <a:prstGeom prst="rect">
             <a:avLst/>
@@ -10497,24 +10982,24 @@
         </p:nvSpPr>
         <p:spPr>
           <a:xfrm>
-            <a:off x="896112" y="1938528"/>
-            <a:ext cx="10515600" cy="384048"/>
-          </a:xfrm>
-          <a:prstGeom prst="rect">
-            <a:avLst/>
-          </a:prstGeom>
-          <a:noFill/>
-          <a:ln/>
-        </p:spPr>
-        <p:txBody>
-          <a:bodyPr wrap="square" lIns="0" tIns="0" rIns="0" bIns="0" rtlCol="0" anchor="ctr"/>
-          <a:lstStyle/>
-          <a:p>
-            <a:pPr indent="0" marL="0">
-              <a:buNone/>
-            </a:pPr>
-            <a:r>
-              <a:rPr lang="en-US" sz="1700" b="1" dirty="0">
+            <a:off x="896112" y="1810512"/>
+            <a:ext cx="10515600" cy="347472"/>
+          </a:xfrm>
+          <a:prstGeom prst="rect">
+            <a:avLst/>
+          </a:prstGeom>
+          <a:noFill/>
+          <a:ln/>
+        </p:spPr>
+        <p:txBody>
+          <a:bodyPr wrap="square" lIns="0" tIns="0" rIns="0" bIns="0" rtlCol="0" anchor="ctr"/>
+          <a:lstStyle/>
+          <a:p>
+            <a:pPr indent="0" marL="0">
+              <a:buNone/>
+            </a:pPr>
+            <a:r>
+              <a:rPr lang="en-US" sz="1600" b="1" dirty="0">
                 <a:solidFill>
                   <a:srgbClr val="FFFFFF"/>
                 </a:solidFill>
@@ -10522,9 +11007,9 @@
                 <a:ea typeface="Cambria" pitchFamily="34" charset="-122"/>
                 <a:cs typeface="Cambria" pitchFamily="34" charset="-120"/>
               </a:rPr>
-              <a:t>The PACE tier is the shared unit of account</a:t>
-            </a:r>
-            <a:endParaRPr lang="en-US" sz="1700" dirty="0"/>
+              <a:t>10 U.S.C. §1102 is the common legal substrate</a:t>
+            </a:r>
+            <a:endParaRPr lang="en-US" sz="1600" dirty="0"/>
           </a:p>
         </p:txBody>
       </p:sp>
@@ -10536,8 +11021,8 @@
         </p:nvSpPr>
         <p:spPr>
           <a:xfrm>
-            <a:off x="896112" y="2340864"/>
-            <a:ext cx="10424160" cy="713232"/>
+            <a:off x="896112" y="2176272"/>
+            <a:ext cx="10424160" cy="694944"/>
           </a:xfrm>
           <a:prstGeom prst="rect">
             <a:avLst/>
@@ -10551,12 +11036,12 @@
           <a:p>
             <a:pPr indent="0" marL="0">
               <a:lnSpc>
-                <a:spcPts val="1800"/>
+                <a:spcPts val="1600"/>
               </a:lnSpc>
               <a:buNone/>
             </a:pPr>
             <a:r>
-              <a:rPr lang="en-US" sz="1250" dirty="0">
+              <a:rPr lang="en-US" sz="1150" dirty="0">
                 <a:solidFill>
                   <a:srgbClr val="C9D6DB"/>
                 </a:solidFill>
@@ -10564,9 +11049,9 @@
                 <a:ea typeface="Calibri" pitchFamily="34" charset="-122"/>
                 <a:cs typeface="Calibri" pitchFamily="34" charset="-120"/>
               </a:rPr>
-              <a:t>CSC defines the tiers and their triggers. The simulation reports its outcomes as tier distributions. Both speak the same language to a commander, and both surface in MedCOP via MAVEN.</a:t>
-            </a:r>
-            <a:endParaRPr lang="en-US" sz="1250" dirty="0"/>
+              <a:t>EWP already handles all credentialing content as protected medical quality assurance information. Measure Dx requires the same charter to function non-punitively. One protection, one handling channel — not four separate conversations with the judge advocate.</a:t>
+            </a:r>
+            <a:endParaRPr lang="en-US" sz="1150" dirty="0"/>
           </a:p>
         </p:txBody>
       </p:sp>
@@ -10578,8 +11063,8 @@
         </p:nvSpPr>
         <p:spPr>
           <a:xfrm>
-            <a:off x="566928" y="3410712"/>
-            <a:ext cx="64008" cy="1051560"/>
+            <a:off x="566928" y="3026664"/>
+            <a:ext cx="64008" cy="914400"/>
           </a:xfrm>
           <a:prstGeom prst="rect">
             <a:avLst/>
@@ -10598,24 +11083,24 @@
         </p:nvSpPr>
         <p:spPr>
           <a:xfrm>
-            <a:off x="896112" y="3355848"/>
-            <a:ext cx="10515600" cy="384048"/>
-          </a:xfrm>
-          <a:prstGeom prst="rect">
-            <a:avLst/>
-          </a:prstGeom>
-          <a:noFill/>
-          <a:ln/>
-        </p:spPr>
-        <p:txBody>
-          <a:bodyPr wrap="square" lIns="0" tIns="0" rIns="0" bIns="0" rtlCol="0" anchor="ctr"/>
-          <a:lstStyle/>
-          <a:p>
-            <a:pPr indent="0" marL="0">
-              <a:buNone/>
-            </a:pPr>
-            <a:r>
-              <a:rPr lang="en-US" sz="1700" b="1" dirty="0">
+            <a:off x="896112" y="2980944"/>
+            <a:ext cx="10515600" cy="347472"/>
+          </a:xfrm>
+          <a:prstGeom prst="rect">
+            <a:avLst/>
+          </a:prstGeom>
+          <a:noFill/>
+          <a:ln/>
+        </p:spPr>
+        <p:txBody>
+          <a:bodyPr wrap="square" lIns="0" tIns="0" rIns="0" bIns="0" rtlCol="0" anchor="ctr"/>
+          <a:lstStyle/>
+          <a:p>
+            <a:pPr indent="0" marL="0">
+              <a:buNone/>
+            </a:pPr>
+            <a:r>
+              <a:rPr lang="en-US" sz="1600" b="1" dirty="0">
                 <a:solidFill>
                   <a:srgbClr val="FFFFFF"/>
                 </a:solidFill>
@@ -10623,9 +11108,9 @@
                 <a:ea typeface="Cambria" pitchFamily="34" charset="-122"/>
                 <a:cs typeface="Cambria" pitchFamily="34" charset="-120"/>
               </a:rPr>
-              <a:t>JTS CPGs remain the measuring stick at every level</a:t>
-            </a:r>
-            <a:endParaRPr lang="en-US" sz="1700" dirty="0"/>
+              <a:t>Scope of utilization is the PACE problem in credentialing language</a:t>
+            </a:r>
+            <a:endParaRPr lang="en-US" sz="1600" dirty="0"/>
           </a:p>
         </p:txBody>
       </p:sp>
@@ -10637,8 +11122,8 @@
         </p:nvSpPr>
         <p:spPr>
           <a:xfrm>
-            <a:off x="896112" y="3758184"/>
-            <a:ext cx="10424160" cy="713232"/>
+            <a:off x="896112" y="3346704"/>
+            <a:ext cx="10424160" cy="694944"/>
           </a:xfrm>
           <a:prstGeom prst="rect">
             <a:avLst/>
@@ -10652,12 +11137,12 @@
           <a:p>
             <a:pPr indent="0" marL="0">
               <a:lnSpc>
-                <a:spcPts val="1800"/>
+                <a:spcPts val="1600"/>
               </a:lnSpc>
               <a:buNone/>
             </a:pPr>
             <a:r>
-              <a:rPr lang="en-US" sz="1250" dirty="0">
+              <a:rPr lang="en-US" sz="1150" dirty="0">
                 <a:solidFill>
                   <a:srgbClr val="C9D6DB"/>
                 </a:solidFill>
@@ -10665,9 +11150,9 @@
                 <a:ea typeface="Calibri" pitchFamily="34" charset="-122"/>
                 <a:cs typeface="Calibri" pitchFamily="34" charset="-120"/>
               </a:rPr>
-              <a:t>Quality improvement does not stop when the standard degrades. The CPG is executable guidance at Primary and a recovery target at Emergency — so there is always something to measure against.</a:t>
-            </a:r>
-            <a:endParaRPr lang="en-US" sz="1250" dirty="0"/>
+              <a:t>EWP privileges a provider to the top of their training, then states plainly that they may exercise only the privileges their current location supports. That gap between credential and capability is exactly what the PACE tiers describe as it widens.</a:t>
+            </a:r>
+            <a:endParaRPr lang="en-US" sz="1150" dirty="0"/>
           </a:p>
         </p:txBody>
       </p:sp>
@@ -10679,8 +11164,8 @@
         </p:nvSpPr>
         <p:spPr>
           <a:xfrm>
-            <a:off x="566928" y="4828032"/>
-            <a:ext cx="64008" cy="1051560"/>
+            <a:off x="566928" y="4197096"/>
+            <a:ext cx="64008" cy="914400"/>
           </a:xfrm>
           <a:prstGeom prst="rect">
             <a:avLst/>
@@ -10699,24 +11184,24 @@
         </p:nvSpPr>
         <p:spPr>
           <a:xfrm>
-            <a:off x="896112" y="4773168"/>
-            <a:ext cx="10515600" cy="384048"/>
-          </a:xfrm>
-          <a:prstGeom prst="rect">
-            <a:avLst/>
-          </a:prstGeom>
-          <a:noFill/>
-          <a:ln/>
-        </p:spPr>
-        <p:txBody>
-          <a:bodyPr wrap="square" lIns="0" tIns="0" rIns="0" bIns="0" rtlCol="0" anchor="ctr"/>
-          <a:lstStyle/>
-          <a:p>
-            <a:pPr indent="0" marL="0">
-              <a:buNone/>
-            </a:pPr>
-            <a:r>
-              <a:rPr lang="en-US" sz="1700" b="1" dirty="0">
+            <a:off x="896112" y="4151376"/>
+            <a:ext cx="10515600" cy="347472"/>
+          </a:xfrm>
+          <a:prstGeom prst="rect">
+            <a:avLst/>
+          </a:prstGeom>
+          <a:noFill/>
+          <a:ln/>
+        </p:spPr>
+        <p:txBody>
+          <a:bodyPr wrap="square" lIns="0" tIns="0" rIns="0" bIns="0" rtlCol="0" anchor="ctr"/>
+          <a:lstStyle/>
+          <a:p>
+            <a:pPr indent="0" marL="0">
+              <a:buNone/>
+            </a:pPr>
+            <a:r>
+              <a:rPr lang="en-US" sz="1600" b="1" dirty="0">
                 <a:solidFill>
                   <a:srgbClr val="FFFFFF"/>
                 </a:solidFill>
@@ -10724,9 +11209,9 @@
                 <a:ea typeface="Cambria" pitchFamily="34" charset="-122"/>
                 <a:cs typeface="Cambria" pitchFamily="34" charset="-120"/>
               </a:rPr>
-              <a:t>Measure Dx supplies the empirical floor</a:t>
-            </a:r>
-            <a:endParaRPr lang="en-US" sz="1700" dirty="0"/>
+              <a:t>The PACE tier is the shared unit of account</a:t>
+            </a:r>
+            <a:endParaRPr lang="en-US" sz="1600" dirty="0"/>
           </a:p>
         </p:txBody>
       </p:sp>
@@ -10738,8 +11223,8 @@
         </p:nvSpPr>
         <p:spPr>
           <a:xfrm>
-            <a:off x="896112" y="5175504"/>
-            <a:ext cx="10424160" cy="713232"/>
+            <a:off x="896112" y="4517136"/>
+            <a:ext cx="10424160" cy="694944"/>
           </a:xfrm>
           <a:prstGeom prst="rect">
             <a:avLst/>
@@ -10753,12 +11238,12 @@
           <a:p>
             <a:pPr indent="0" marL="0">
               <a:lnSpc>
-                <a:spcPts val="1800"/>
+                <a:spcPts val="1600"/>
               </a:lnSpc>
               <a:buNone/>
             </a:pPr>
             <a:r>
-              <a:rPr lang="en-US" sz="1250" dirty="0">
+              <a:rPr lang="en-US" sz="1150" dirty="0">
                 <a:solidFill>
                   <a:srgbClr val="C9D6DB"/>
                 </a:solidFill>
@@ -10766,48 +11251,110 @@
                 <a:ea typeface="Calibri" pitchFamily="34" charset="-122"/>
                 <a:cs typeface="Calibri" pitchFamily="34" charset="-120"/>
               </a:rPr>
-              <a:t>The simulation predicts where care breaks. Measure Dx observes where it actually broke, with a true denominator no civilian system can compute. One is a hypothesis; the other is evidence.</a:t>
-            </a:r>
-            <a:endParaRPr lang="en-US" sz="1250" dirty="0"/>
-          </a:p>
-        </p:txBody>
-      </p:sp>
-      <p:sp>
-        <p:nvSpPr>
-          <p:cNvPr id="13" name="Text 11"/>
-          <p:cNvSpPr/>
-          <p:nvPr/>
-        </p:nvSpPr>
-        <p:spPr>
-          <a:xfrm>
-            <a:off x="896112" y="6172200"/>
-            <a:ext cx="10424160" cy="384048"/>
-          </a:xfrm>
-          <a:prstGeom prst="rect">
-            <a:avLst/>
-          </a:prstGeom>
-          <a:noFill/>
-          <a:ln/>
-        </p:spPr>
-        <p:txBody>
-          <a:bodyPr wrap="square" lIns="0" tIns="0" rIns="0" bIns="0" rtlCol="0" anchor="ctr"/>
-          <a:lstStyle/>
-          <a:p>
-            <a:pPr indent="0" marL="0">
-              <a:buNone/>
-            </a:pPr>
-            <a:r>
-              <a:rPr lang="en-US" sz="1200" i="1" dirty="0">
-                <a:solidFill>
-                  <a:srgbClr val="7FA99B"/>
+              <a:t>CSC defines the tiers and their triggers; the simulation reports its outcomes as tier distributions. Both speak one language to a commander, and both surface in MedCOP via MAVEN.</a:t>
+            </a:r>
+            <a:endParaRPr lang="en-US" sz="1150" dirty="0"/>
+          </a:p>
+        </p:txBody>
+      </p:sp>
+      <p:sp>
+        <p:nvSpPr>
+          <p:cNvPr id="13" name="Shape 11"/>
+          <p:cNvSpPr/>
+          <p:nvPr/>
+        </p:nvSpPr>
+        <p:spPr>
+          <a:xfrm>
+            <a:off x="566928" y="5367528"/>
+            <a:ext cx="64008" cy="914400"/>
+          </a:xfrm>
+          <a:prstGeom prst="rect">
+            <a:avLst/>
+          </a:prstGeom>
+          <a:solidFill>
+            <a:srgbClr val="9B2C2C"/>
+          </a:solidFill>
+          <a:ln/>
+        </p:spPr>
+      </p:sp>
+      <p:sp>
+        <p:nvSpPr>
+          <p:cNvPr id="14" name="Text 12"/>
+          <p:cNvSpPr/>
+          <p:nvPr/>
+        </p:nvSpPr>
+        <p:spPr>
+          <a:xfrm>
+            <a:off x="896112" y="5321808"/>
+            <a:ext cx="10515600" cy="347472"/>
+          </a:xfrm>
+          <a:prstGeom prst="rect">
+            <a:avLst/>
+          </a:prstGeom>
+          <a:noFill/>
+          <a:ln/>
+        </p:spPr>
+        <p:txBody>
+          <a:bodyPr wrap="square" lIns="0" tIns="0" rIns="0" bIns="0" rtlCol="0" anchor="ctr"/>
+          <a:lstStyle/>
+          <a:p>
+            <a:pPr indent="0" marL="0">
+              <a:buNone/>
+            </a:pPr>
+            <a:r>
+              <a:rPr lang="en-US" sz="1600" b="1" dirty="0">
+                <a:solidFill>
+                  <a:srgbClr val="FFFFFF"/>
+                </a:solidFill>
+                <a:latin typeface="Cambria" pitchFamily="34" charset="0"/>
+                <a:ea typeface="Cambria" pitchFamily="34" charset="-122"/>
+                <a:cs typeface="Cambria" pitchFamily="34" charset="-120"/>
+              </a:rPr>
+              <a:t>Peer review is where all four already meet</a:t>
+            </a:r>
+            <a:endParaRPr lang="en-US" sz="1600" dirty="0"/>
+          </a:p>
+        </p:txBody>
+      </p:sp>
+      <p:sp>
+        <p:nvSpPr>
+          <p:cNvPr id="15" name="Text 13"/>
+          <p:cNvSpPr/>
+          <p:nvPr/>
+        </p:nvSpPr>
+        <p:spPr>
+          <a:xfrm>
+            <a:off x="896112" y="5687568"/>
+            <a:ext cx="10424160" cy="694944"/>
+          </a:xfrm>
+          <a:prstGeom prst="rect">
+            <a:avLst/>
+          </a:prstGeom>
+          <a:noFill/>
+          <a:ln/>
+        </p:spPr>
+        <p:txBody>
+          <a:bodyPr wrap="square" lIns="0" tIns="0" rIns="0" bIns="0" rtlCol="0" anchor="ctr"/>
+          <a:lstStyle/>
+          <a:p>
+            <a:pPr indent="0" marL="0">
+              <a:lnSpc>
+                <a:spcPts val="1600"/>
+              </a:lnSpc>
+              <a:buNone/>
+            </a:pPr>
+            <a:r>
+              <a:rPr lang="en-US" sz="1150" dirty="0">
+                <a:solidFill>
+                  <a:srgbClr val="C9D6DB"/>
                 </a:solidFill>
                 <a:latin typeface="Calibri" pitchFamily="34" charset="0"/>
                 <a:ea typeface="Calibri" pitchFamily="34" charset="-122"/>
                 <a:cs typeface="Calibri" pitchFamily="34" charset="-120"/>
               </a:rPr>
-              <a:t>Take any one away and the others lose a function: an untested standard, an outcome with no definition, or a prediction that is never checked against what happened.</a:t>
-            </a:r>
-            <a:endParaRPr lang="en-US" sz="1200" dirty="0"/>
+              <a:t>EWP needs SMART performance metrics for FPPE and OPPE. Measure Dx produces exactly that class of measure, with a true denominator. The recurring EWP product is already “forms to track peer review” — this supplies the content.</a:t>
+            </a:r>
+            <a:endParaRPr lang="en-US" sz="1150" dirty="0"/>
           </a:p>
         </p:txBody>
       </p:sp>
